--- a/dist/weeks-포트폴리오제작/포트폴리오제작_12주차_온라인포트폴리오.pptx
+++ b/dist/weeks-포트폴리오제작/포트폴리오제작_12주차_온라인포트폴리오.pptx
@@ -9849,7 +9849,7 @@
         <p:spPr>
           <a:xfrm>
             <a:off x="1353312" y="1755648"/>
-            <a:ext cx="4248760" cy="585216"/>
+            <a:ext cx="4267048" cy="585216"/>
           </a:xfrm>
           <a:prstGeom prst="rect">
             <a:avLst/>
@@ -9977,7 +9977,7 @@
         <p:spPr>
           <a:xfrm>
             <a:off x="1353312" y="2487168"/>
-            <a:ext cx="4248760" cy="585216"/>
+            <a:ext cx="4267048" cy="585216"/>
           </a:xfrm>
           <a:prstGeom prst="rect">
             <a:avLst/>
@@ -10105,7 +10105,7 @@
         <p:spPr>
           <a:xfrm>
             <a:off x="1353312" y="3218688"/>
-            <a:ext cx="4248760" cy="585216"/>
+            <a:ext cx="4267048" cy="585216"/>
           </a:xfrm>
           <a:prstGeom prst="rect">
             <a:avLst/>
@@ -10233,7 +10233,7 @@
         <p:spPr>
           <a:xfrm>
             <a:off x="1353312" y="3950208"/>
-            <a:ext cx="4248760" cy="585216"/>
+            <a:ext cx="4267048" cy="585216"/>
           </a:xfrm>
           <a:prstGeom prst="rect">
             <a:avLst/>
@@ -10361,7 +10361,7 @@
         <p:spPr>
           <a:xfrm>
             <a:off x="7010248" y="1755648"/>
-            <a:ext cx="4248760" cy="585216"/>
+            <a:ext cx="4267048" cy="585216"/>
           </a:xfrm>
           <a:prstGeom prst="rect">
             <a:avLst/>
@@ -10489,7 +10489,7 @@
         <p:spPr>
           <a:xfrm>
             <a:off x="7010248" y="2487168"/>
-            <a:ext cx="4248760" cy="585216"/>
+            <a:ext cx="4267048" cy="585216"/>
           </a:xfrm>
           <a:prstGeom prst="rect">
             <a:avLst/>
@@ -10617,7 +10617,7 @@
         <p:spPr>
           <a:xfrm>
             <a:off x="7010248" y="3218688"/>
-            <a:ext cx="4248760" cy="585216"/>
+            <a:ext cx="4267048" cy="585216"/>
           </a:xfrm>
           <a:prstGeom prst="rect">
             <a:avLst/>
@@ -10745,7 +10745,7 @@
         <p:spPr>
           <a:xfrm>
             <a:off x="7010248" y="3950208"/>
-            <a:ext cx="4248760" cy="585216"/>
+            <a:ext cx="4267048" cy="585216"/>
           </a:xfrm>
           <a:prstGeom prst="rect">
             <a:avLst/>
@@ -10783,7 +10783,7 @@
         </p:nvSpPr>
         <p:spPr>
           <a:xfrm>
-            <a:off x="640080" y="5468112"/>
+            <a:off x="640080" y="4736592"/>
             <a:ext cx="10911535" cy="7315"/>
           </a:xfrm>
           <a:prstGeom prst="rect">
@@ -10808,7 +10808,7 @@
         </p:nvSpPr>
         <p:spPr>
           <a:xfrm>
-            <a:off x="640080" y="5577840"/>
+            <a:off x="640080" y="4846320"/>
             <a:ext cx="10911535" cy="402336"/>
           </a:xfrm>
           <a:prstGeom prst="rect">

--- a/dist/weeks-포트폴리오제작/포트폴리오제작_12주차_온라인포트폴리오.pptx
+++ b/dist/weeks-포트폴리오제작/포트폴리오제작_12주차_온라인포트폴리오.pptx
@@ -2244,7 +2244,7 @@
                 <a:ea typeface="Pretendard" pitchFamily="34" charset="-122"/>
                 <a:cs typeface="Pretendard" pitchFamily="34" charset="-120"/>
               </a:rPr>
-              <a:t>90분 — 강의 20분 · 제작 실습 60분</a:t>
+              <a:t>120분 — 강의 20분 · 제작 실습 80분 · 정리 10분</a:t>
             </a:r>
             <a:endParaRPr lang="en-US" sz="1200" dirty="0"/>
           </a:p>
@@ -3830,7 +3830,7 @@
                 <a:ea typeface="Pretendard Black" pitchFamily="34" charset="-122"/>
                 <a:cs typeface="Pretendard Black" pitchFamily="34" charset="-120"/>
               </a:rPr>
-              <a:t>오늘의 90분</a:t>
+              <a:t>오늘의 120분</a:t>
             </a:r>
             <a:endParaRPr lang="en-US" sz="3000" dirty="0"/>
           </a:p>
@@ -3869,7 +3869,7 @@
                 <a:ea typeface="Pretendard" pitchFamily="34" charset="-122"/>
                 <a:cs typeface="Pretendard" pitchFamily="34" charset="-120"/>
               </a:rPr>
-              <a:t>강의 20분 · 제작 실습 60분</a:t>
+              <a:t>강의 20분 · 제작 실습 80분 · 정리 10분</a:t>
             </a:r>
             <a:endParaRPr lang="en-US" sz="1150" dirty="0"/>
           </a:p>
@@ -3909,7 +3909,7 @@
         <p:spPr>
           <a:xfrm>
             <a:off x="640080" y="1719072"/>
-            <a:ext cx="1600200" cy="932688"/>
+            <a:ext cx="1600200" cy="830275"/>
           </a:xfrm>
           <a:prstGeom prst="rect">
             <a:avLst/>
@@ -3948,7 +3948,7 @@
         <p:spPr>
           <a:xfrm>
             <a:off x="2377440" y="1719072"/>
-            <a:ext cx="6888175" cy="932688"/>
+            <a:ext cx="6888175" cy="830275"/>
           </a:xfrm>
           <a:prstGeom prst="rect">
             <a:avLst/>
@@ -3987,7 +3987,7 @@
         <p:spPr>
           <a:xfrm>
             <a:off x="9265615" y="1719072"/>
-            <a:ext cx="2286000" cy="932688"/>
+            <a:ext cx="2286000" cy="830275"/>
           </a:xfrm>
           <a:prstGeom prst="rect">
             <a:avLst/>
@@ -4025,7 +4025,7 @@
         </p:nvSpPr>
         <p:spPr>
           <a:xfrm>
-            <a:off x="640080" y="2633472"/>
+            <a:off x="640080" y="2531059"/>
             <a:ext cx="10911535" cy="7315"/>
           </a:xfrm>
           <a:prstGeom prst="rect">
@@ -4050,8 +4050,8 @@
         </p:nvSpPr>
         <p:spPr>
           <a:xfrm>
-            <a:off x="640080" y="2651760"/>
-            <a:ext cx="1600200" cy="932688"/>
+            <a:off x="640080" y="2549347"/>
+            <a:ext cx="1600200" cy="830275"/>
           </a:xfrm>
           <a:prstGeom prst="rect">
             <a:avLst/>
@@ -4075,7 +4075,7 @@
                 <a:ea typeface="Pretendard" pitchFamily="34" charset="-122"/>
                 <a:cs typeface="Pretendard" pitchFamily="34" charset="-120"/>
               </a:rPr>
-              <a:t>00:20–01:20</a:t>
+              <a:t>00:20–01:05</a:t>
             </a:r>
             <a:endParaRPr lang="en-US" sz="1050" dirty="0"/>
           </a:p>
@@ -4089,8 +4089,8 @@
         </p:nvSpPr>
         <p:spPr>
           <a:xfrm>
-            <a:off x="2377440" y="2651760"/>
-            <a:ext cx="6888175" cy="932688"/>
+            <a:off x="2377440" y="2549347"/>
+            <a:ext cx="6888175" cy="830275"/>
           </a:xfrm>
           <a:prstGeom prst="rect">
             <a:avLst/>
@@ -4114,7 +4114,7 @@
                 <a:ea typeface="Pretendard" pitchFamily="34" charset="-122"/>
                 <a:cs typeface="Pretendard" pitchFamily="34" charset="-120"/>
               </a:rPr>
-              <a:t>온라인 포트폴리오 제작 실습</a:t>
+              <a:t>온라인 포트폴리오 제작 실습 (1)</a:t>
             </a:r>
             <a:endParaRPr lang="en-US" sz="1300" dirty="0"/>
           </a:p>
@@ -4128,8 +4128,8 @@
         </p:nvSpPr>
         <p:spPr>
           <a:xfrm>
-            <a:off x="9265615" y="2651760"/>
-            <a:ext cx="2286000" cy="932688"/>
+            <a:off x="9265615" y="2549347"/>
+            <a:ext cx="2286000" cy="830275"/>
           </a:xfrm>
           <a:prstGeom prst="rect">
             <a:avLst/>
@@ -4167,7 +4167,7 @@
         </p:nvSpPr>
         <p:spPr>
           <a:xfrm>
-            <a:off x="640080" y="3566160"/>
+            <a:off x="640080" y="3361334"/>
             <a:ext cx="10911535" cy="7315"/>
           </a:xfrm>
           <a:prstGeom prst="rect">
@@ -4192,8 +4192,8 @@
         </p:nvSpPr>
         <p:spPr>
           <a:xfrm>
-            <a:off x="640080" y="3584448"/>
-            <a:ext cx="1600200" cy="932688"/>
+            <a:off x="640080" y="3379622"/>
+            <a:ext cx="1600200" cy="830275"/>
           </a:xfrm>
           <a:prstGeom prst="rect">
             <a:avLst/>
@@ -4209,6 +4209,109 @@
               <a:buNone/>
             </a:pPr>
             <a:r>
+              <a:rPr lang="en-US" sz="1050" spc="60" kern="0" dirty="0">
+                <a:solidFill>
+                  <a:srgbClr val="9B9B9B"/>
+                </a:solidFill>
+                <a:latin typeface="Pretendard" pitchFamily="34" charset="0"/>
+                <a:ea typeface="Pretendard" pitchFamily="34" charset="-122"/>
+                <a:cs typeface="Pretendard" pitchFamily="34" charset="-120"/>
+              </a:rPr>
+              <a:t>01:05–01:15</a:t>
+            </a:r>
+            <a:endParaRPr lang="en-US" sz="1050" dirty="0"/>
+          </a:p>
+        </p:txBody>
+      </p:sp>
+      <p:sp>
+        <p:nvSpPr>
+          <p:cNvPr id="19" name="Text 17"/>
+          <p:cNvSpPr/>
+          <p:nvPr/>
+        </p:nvSpPr>
+        <p:spPr>
+          <a:xfrm>
+            <a:off x="2377440" y="3379622"/>
+            <a:ext cx="6888175" cy="830275"/>
+          </a:xfrm>
+          <a:prstGeom prst="rect">
+            <a:avLst/>
+          </a:prstGeom>
+          <a:noFill/>
+          <a:ln/>
+        </p:spPr>
+        <p:txBody>
+          <a:bodyPr wrap="square" lIns="0" tIns="0" rIns="0" bIns="0" rtlCol="0" anchor="ctr"/>
+          <a:lstStyle/>
+          <a:p>
+            <a:pPr indent="0" marL="0">
+              <a:buNone/>
+            </a:pPr>
+            <a:r>
+              <a:rPr lang="en-US" sz="1100" dirty="0">
+                <a:solidFill>
+                  <a:srgbClr val="9B9B9B"/>
+                </a:solidFill>
+                <a:latin typeface="Pretendard" pitchFamily="34" charset="0"/>
+                <a:ea typeface="Pretendard" pitchFamily="34" charset="-122"/>
+                <a:cs typeface="Pretendard" pitchFamily="34" charset="-120"/>
+              </a:rPr>
+              <a:t>휴식</a:t>
+            </a:r>
+            <a:endParaRPr lang="en-US" sz="1100" dirty="0"/>
+          </a:p>
+        </p:txBody>
+      </p:sp>
+      <p:sp>
+        <p:nvSpPr>
+          <p:cNvPr id="20" name="Shape 18"/>
+          <p:cNvSpPr/>
+          <p:nvPr/>
+        </p:nvSpPr>
+        <p:spPr>
+          <a:xfrm>
+            <a:off x="640080" y="4191610"/>
+            <a:ext cx="10911535" cy="7315"/>
+          </a:xfrm>
+          <a:prstGeom prst="rect">
+            <a:avLst/>
+          </a:prstGeom>
+          <a:solidFill>
+            <a:srgbClr val="EFEFEF"/>
+          </a:solidFill>
+          <a:ln w="12700">
+            <a:solidFill>
+              <a:srgbClr val="EFEFEF"/>
+            </a:solidFill>
+            <a:prstDash val="solid"/>
+          </a:ln>
+        </p:spPr>
+      </p:sp>
+      <p:sp>
+        <p:nvSpPr>
+          <p:cNvPr id="21" name="Text 19"/>
+          <p:cNvSpPr/>
+          <p:nvPr/>
+        </p:nvSpPr>
+        <p:spPr>
+          <a:xfrm>
+            <a:off x="640080" y="4209898"/>
+            <a:ext cx="1600200" cy="830275"/>
+          </a:xfrm>
+          <a:prstGeom prst="rect">
+            <a:avLst/>
+          </a:prstGeom>
+          <a:noFill/>
+          <a:ln/>
+        </p:spPr>
+        <p:txBody>
+          <a:bodyPr wrap="square" lIns="0" tIns="0" rIns="0" bIns="0" rtlCol="0" anchor="ctr"/>
+          <a:lstStyle/>
+          <a:p>
+            <a:pPr indent="0" marL="0">
+              <a:buNone/>
+            </a:pPr>
+            <a:r>
               <a:rPr lang="en-US" sz="1050" b="1" spc="60" kern="0" dirty="0">
                 <a:solidFill>
                   <a:srgbClr val="111111"/>
@@ -4217,7 +4320,7 @@
                 <a:ea typeface="Pretendard" pitchFamily="34" charset="-122"/>
                 <a:cs typeface="Pretendard" pitchFamily="34" charset="-120"/>
               </a:rPr>
-              <a:t>01:20–01:30</a:t>
+              <a:t>01:15–01:50</a:t>
             </a:r>
             <a:endParaRPr lang="en-US" sz="1050" dirty="0"/>
           </a:p>
@@ -4225,14 +4328,14 @@
       </p:sp>
       <p:sp>
         <p:nvSpPr>
-          <p:cNvPr id="19" name="Text 17"/>
-          <p:cNvSpPr/>
-          <p:nvPr/>
-        </p:nvSpPr>
-        <p:spPr>
-          <a:xfrm>
-            <a:off x="2377440" y="3584448"/>
-            <a:ext cx="6888175" cy="932688"/>
+          <p:cNvPr id="22" name="Text 20"/>
+          <p:cNvSpPr/>
+          <p:nvPr/>
+        </p:nvSpPr>
+        <p:spPr>
+          <a:xfrm>
+            <a:off x="2377440" y="4209898"/>
+            <a:ext cx="6888175" cy="830275"/>
           </a:xfrm>
           <a:prstGeom prst="rect">
             <a:avLst/>
@@ -4256,6 +4359,148 @@
                 <a:ea typeface="Pretendard" pitchFamily="34" charset="-122"/>
                 <a:cs typeface="Pretendard" pitchFamily="34" charset="-120"/>
               </a:rPr>
+              <a:t>온라인 포트폴리오 제작 실습 (2)</a:t>
+            </a:r>
+            <a:endParaRPr lang="en-US" sz="1300" dirty="0"/>
+          </a:p>
+        </p:txBody>
+      </p:sp>
+      <p:sp>
+        <p:nvSpPr>
+          <p:cNvPr id="23" name="Text 21"/>
+          <p:cNvSpPr/>
+          <p:nvPr/>
+        </p:nvSpPr>
+        <p:spPr>
+          <a:xfrm>
+            <a:off x="9265615" y="4209898"/>
+            <a:ext cx="2286000" cy="830275"/>
+          </a:xfrm>
+          <a:prstGeom prst="rect">
+            <a:avLst/>
+          </a:prstGeom>
+          <a:noFill/>
+          <a:ln/>
+        </p:spPr>
+        <p:txBody>
+          <a:bodyPr wrap="square" lIns="0" tIns="0" rIns="0" bIns="0" rtlCol="0" anchor="ctr"/>
+          <a:lstStyle/>
+          <a:p>
+            <a:pPr algn="r" indent="0" marL="0">
+              <a:buNone/>
+            </a:pPr>
+            <a:r>
+              <a:rPr lang="en-US" sz="1050" dirty="0">
+                <a:solidFill>
+                  <a:srgbClr val="6E6E6E"/>
+                </a:solidFill>
+                <a:latin typeface="Pretendard" pitchFamily="34" charset="0"/>
+                <a:ea typeface="Pretendard" pitchFamily="34" charset="-122"/>
+                <a:cs typeface="Pretendard" pitchFamily="34" charset="-120"/>
+              </a:rPr>
+              <a:t>개인 워크 + 순회</a:t>
+            </a:r>
+            <a:endParaRPr lang="en-US" sz="1050" dirty="0"/>
+          </a:p>
+        </p:txBody>
+      </p:sp>
+      <p:sp>
+        <p:nvSpPr>
+          <p:cNvPr id="24" name="Shape 22"/>
+          <p:cNvSpPr/>
+          <p:nvPr/>
+        </p:nvSpPr>
+        <p:spPr>
+          <a:xfrm>
+            <a:off x="640080" y="5021885"/>
+            <a:ext cx="10911535" cy="7315"/>
+          </a:xfrm>
+          <a:prstGeom prst="rect">
+            <a:avLst/>
+          </a:prstGeom>
+          <a:solidFill>
+            <a:srgbClr val="DCDCDC"/>
+          </a:solidFill>
+          <a:ln w="12700">
+            <a:solidFill>
+              <a:srgbClr val="DCDCDC"/>
+            </a:solidFill>
+            <a:prstDash val="solid"/>
+          </a:ln>
+        </p:spPr>
+      </p:sp>
+      <p:sp>
+        <p:nvSpPr>
+          <p:cNvPr id="25" name="Text 23"/>
+          <p:cNvSpPr/>
+          <p:nvPr/>
+        </p:nvSpPr>
+        <p:spPr>
+          <a:xfrm>
+            <a:off x="640080" y="5040173"/>
+            <a:ext cx="1600200" cy="830275"/>
+          </a:xfrm>
+          <a:prstGeom prst="rect">
+            <a:avLst/>
+          </a:prstGeom>
+          <a:noFill/>
+          <a:ln/>
+        </p:spPr>
+        <p:txBody>
+          <a:bodyPr wrap="square" lIns="0" tIns="0" rIns="0" bIns="0" rtlCol="0" anchor="ctr"/>
+          <a:lstStyle/>
+          <a:p>
+            <a:pPr indent="0" marL="0">
+              <a:buNone/>
+            </a:pPr>
+            <a:r>
+              <a:rPr lang="en-US" sz="1050" b="1" spc="60" kern="0" dirty="0">
+                <a:solidFill>
+                  <a:srgbClr val="111111"/>
+                </a:solidFill>
+                <a:latin typeface="Pretendard" pitchFamily="34" charset="0"/>
+                <a:ea typeface="Pretendard" pitchFamily="34" charset="-122"/>
+                <a:cs typeface="Pretendard" pitchFamily="34" charset="-120"/>
+              </a:rPr>
+              <a:t>01:50–02:00</a:t>
+            </a:r>
+            <a:endParaRPr lang="en-US" sz="1050" dirty="0"/>
+          </a:p>
+        </p:txBody>
+      </p:sp>
+      <p:sp>
+        <p:nvSpPr>
+          <p:cNvPr id="26" name="Text 24"/>
+          <p:cNvSpPr/>
+          <p:nvPr/>
+        </p:nvSpPr>
+        <p:spPr>
+          <a:xfrm>
+            <a:off x="2377440" y="5040173"/>
+            <a:ext cx="6888175" cy="830275"/>
+          </a:xfrm>
+          <a:prstGeom prst="rect">
+            <a:avLst/>
+          </a:prstGeom>
+          <a:noFill/>
+          <a:ln/>
+        </p:spPr>
+        <p:txBody>
+          <a:bodyPr wrap="square" lIns="0" tIns="0" rIns="0" bIns="0" rtlCol="0" anchor="ctr"/>
+          <a:lstStyle/>
+          <a:p>
+            <a:pPr indent="0" marL="0">
+              <a:buNone/>
+            </a:pPr>
+            <a:r>
+              <a:rPr lang="en-US" sz="1300" b="1" dirty="0">
+                <a:solidFill>
+                  <a:srgbClr val="111111"/>
+                </a:solidFill>
+                <a:latin typeface="Pretendard" pitchFamily="34" charset="0"/>
+                <a:ea typeface="Pretendard" pitchFamily="34" charset="-122"/>
+                <a:cs typeface="Pretendard" pitchFamily="34" charset="-120"/>
+              </a:rPr>
               <a:t>링크 확인 · 과제 안내</a:t>
             </a:r>
             <a:endParaRPr lang="en-US" sz="1300" dirty="0"/>
@@ -4264,14 +4509,14 @@
       </p:sp>
       <p:sp>
         <p:nvSpPr>
-          <p:cNvPr id="20" name="Text 18"/>
-          <p:cNvSpPr/>
-          <p:nvPr/>
-        </p:nvSpPr>
-        <p:spPr>
-          <a:xfrm>
-            <a:off x="9265615" y="3584448"/>
-            <a:ext cx="2286000" cy="932688"/>
+          <p:cNvPr id="27" name="Text 25"/>
+          <p:cNvSpPr/>
+          <p:nvPr/>
+        </p:nvSpPr>
+        <p:spPr>
+          <a:xfrm>
+            <a:off x="9265615" y="5040173"/>
+            <a:ext cx="2286000" cy="830275"/>
           </a:xfrm>
           <a:prstGeom prst="rect">
             <a:avLst/>
@@ -4303,14 +4548,14 @@
       </p:sp>
       <p:sp>
         <p:nvSpPr>
-          <p:cNvPr id="21" name="Shape 19"/>
-          <p:cNvSpPr/>
-          <p:nvPr/>
-        </p:nvSpPr>
-        <p:spPr>
-          <a:xfrm>
-            <a:off x="640080" y="4828032"/>
-            <a:ext cx="10911535" cy="969264"/>
+          <p:cNvPr id="28" name="Shape 26"/>
+          <p:cNvSpPr/>
+          <p:nvPr/>
+        </p:nvSpPr>
+        <p:spPr>
+          <a:xfrm>
+            <a:off x="640080" y="5852160"/>
+            <a:ext cx="10911535" cy="7315"/>
           </a:xfrm>
           <a:prstGeom prst="rect">
             <a:avLst/>
@@ -4328,88 +4573,7 @@
       </p:sp>
       <p:sp>
         <p:nvSpPr>
-          <p:cNvPr id="22" name="Text 20"/>
-          <p:cNvSpPr/>
-          <p:nvPr/>
-        </p:nvSpPr>
-        <p:spPr>
-          <a:xfrm>
-            <a:off x="1097280" y="5010912"/>
-            <a:ext cx="2743200" cy="256032"/>
-          </a:xfrm>
-          <a:prstGeom prst="rect">
-            <a:avLst/>
-          </a:prstGeom>
-          <a:noFill/>
-          <a:ln/>
-        </p:spPr>
-        <p:txBody>
-          <a:bodyPr wrap="square" lIns="0" tIns="0" rIns="0" bIns="0" rtlCol="0" anchor="ctr"/>
-          <a:lstStyle/>
-          <a:p>
-            <a:pPr indent="0" marL="0">
-              <a:buNone/>
-            </a:pPr>
-            <a:r>
-              <a:rPr lang="en-US" sz="950" spc="240" kern="0" dirty="0">
-                <a:solidFill>
-                  <a:srgbClr val="9A9A9A"/>
-                </a:solidFill>
-                <a:latin typeface="Pretendard" pitchFamily="34" charset="0"/>
-                <a:ea typeface="Pretendard" pitchFamily="34" charset="-122"/>
-                <a:cs typeface="Pretendard" pitchFamily="34" charset="-120"/>
-              </a:rPr>
-              <a:t>오늘 끝나면</a:t>
-            </a:r>
-            <a:endParaRPr lang="en-US" sz="950" dirty="0"/>
-          </a:p>
-        </p:txBody>
-      </p:sp>
-      <p:sp>
-        <p:nvSpPr>
-          <p:cNvPr id="23" name="Text 21"/>
-          <p:cNvSpPr/>
-          <p:nvPr/>
-        </p:nvSpPr>
-        <p:spPr>
-          <a:xfrm>
-            <a:off x="1097280" y="5285232"/>
-            <a:ext cx="9997135" cy="365760"/>
-          </a:xfrm>
-          <a:prstGeom prst="rect">
-            <a:avLst/>
-          </a:prstGeom>
-          <a:noFill/>
-          <a:ln/>
-        </p:spPr>
-        <p:txBody>
-          <a:bodyPr wrap="square" lIns="0" tIns="0" rIns="0" bIns="0" rtlCol="0" anchor="ctr"/>
-          <a:lstStyle/>
-          <a:p>
-            <a:pPr indent="0" marL="0">
-              <a:lnSpc>
-                <a:spcPct val="126000"/>
-              </a:lnSpc>
-              <a:buNone/>
-            </a:pPr>
-            <a:r>
-              <a:rPr lang="en-US" sz="1600" dirty="0">
-                <a:solidFill>
-                  <a:srgbClr val="FFFFFF"/>
-                </a:solidFill>
-                <a:latin typeface="Pretendard Black" pitchFamily="34" charset="0"/>
-                <a:ea typeface="Pretendard Black" pitchFamily="34" charset="-122"/>
-                <a:cs typeface="Pretendard Black" pitchFamily="34" charset="-120"/>
-              </a:rPr>
-              <a:t>남에게 보낼 수 있는 링크가 하나 생깁니다. 완성도는 아직 낮아도 됩니다.</a:t>
-            </a:r>
-            <a:endParaRPr lang="en-US" sz="1600" dirty="0"/>
-          </a:p>
-        </p:txBody>
-      </p:sp>
-      <p:sp>
-        <p:nvSpPr>
-          <p:cNvPr id="24" name="Shape 22"/>
+          <p:cNvPr id="29" name="Shape 27"/>
           <p:cNvSpPr/>
           <p:nvPr/>
         </p:nvSpPr>
@@ -4434,7 +4598,7 @@
       </p:sp>
       <p:sp>
         <p:nvSpPr>
-          <p:cNvPr id="25" name="Text 23"/>
+          <p:cNvPr id="30" name="Text 28"/>
           <p:cNvSpPr/>
           <p:nvPr/>
         </p:nvSpPr>
@@ -4473,7 +4637,7 @@
       </p:sp>
       <p:sp>
         <p:nvSpPr>
-          <p:cNvPr id="26" name="Text 24"/>
+          <p:cNvPr id="31" name="Text 29"/>
           <p:cNvSpPr/>
           <p:nvPr/>
         </p:nvSpPr>
@@ -8771,7 +8935,7 @@
                 <a:ea typeface="Pretendard" pitchFamily="34" charset="-122"/>
                 <a:cs typeface="Pretendard" pitchFamily="34" charset="-120"/>
               </a:rPr>
-              <a:t>60분 · 개인 — 완성이 아니라 '링크가 생기는 것'이 목표입니다.</a:t>
+              <a:t>80분 · 개인 — 완성이 아니라 '링크가 생기는 것'이 목표입니다. 중간에 휴식이 한 번 들어갑니다.</a:t>
             </a:r>
             <a:endParaRPr lang="en-US" sz="1150" dirty="0"/>
           </a:p>
@@ -8835,7 +8999,7 @@
                 <a:ea typeface="Pretendard Light" pitchFamily="34" charset="-122"/>
                 <a:cs typeface="Pretendard Light" pitchFamily="34" charset="-120"/>
               </a:rPr>
-              <a:t>5분</a:t>
+              <a:t>6분</a:t>
             </a:r>
             <a:endParaRPr lang="en-US" sz="2200" dirty="0"/>
           </a:p>
@@ -8980,7 +9144,7 @@
                 <a:ea typeface="Pretendard Light" pitchFamily="34" charset="-122"/>
                 <a:cs typeface="Pretendard Light" pitchFamily="34" charset="-120"/>
               </a:rPr>
-              <a:t>15분</a:t>
+              <a:t>18분</a:t>
             </a:r>
             <a:endParaRPr lang="en-US" sz="2200" dirty="0"/>
           </a:p>
@@ -9125,7 +9289,7 @@
                 <a:ea typeface="Pretendard Light" pitchFamily="34" charset="-122"/>
                 <a:cs typeface="Pretendard Light" pitchFamily="34" charset="-120"/>
               </a:rPr>
-              <a:t>30분</a:t>
+              <a:t>42분</a:t>
             </a:r>
             <a:endParaRPr lang="en-US" sz="2200" dirty="0"/>
           </a:p>
@@ -9270,7 +9434,7 @@
                 <a:ea typeface="Pretendard Light" pitchFamily="34" charset="-122"/>
                 <a:cs typeface="Pretendard Light" pitchFamily="34" charset="-120"/>
               </a:rPr>
-              <a:t>10분</a:t>
+              <a:t>14분</a:t>
             </a:r>
             <a:endParaRPr lang="en-US" sz="2200" dirty="0"/>
           </a:p>

--- a/dist/weeks-포트폴리오제작/포트폴리오제작_12주차_온라인포트폴리오.pptx
+++ b/dist/weeks-포트폴리오제작/포트폴리오제작_12주차_온라인포트폴리오.pptx
@@ -511,7 +511,8 @@
           <a:p>
             <a:r>
               <a:rPr lang="en-US" dirty="0"/>
-              <a:t>오늘의 목표는 '완성'이 아니라 '링크가 존재하는 상태'다. 완벽하게 만들려다 아무것도 못 올리는 학생이 매년 나온다.</a:t>
+              <a:t>[운영 메모]
+오늘의 목표는 '완성'이 아니라 '링크가 존재하는 상태'다. 완벽하게 만들려다 아무것도 못 올리는 학생이 매년 나온다.</a:t>
             </a:r>
             <a:endParaRPr lang="en-US" dirty="0"/>
           </a:p>
@@ -599,7 +600,8 @@
           <a:p>
             <a:r>
               <a:rPr lang="en-US" dirty="0"/>
-              <a:t>이력서를 미리 받아둬야 13주차에 '연계'를 다룰 수 있다. 없으면 그 주가 공회전한다.</a:t>
+              <a:t>[운영 메모]
+이력서를 미리 받아둬야 13주차에 '연계'를 다룰 수 있다. 없으면 그 주가 공회전한다.</a:t>
             </a:r>
             <a:endParaRPr lang="en-US" dirty="0"/>
           </a:p>
@@ -687,7 +689,8 @@
           <a:p>
             <a:r>
               <a:rPr lang="en-US" dirty="0"/>
-              <a:t>실습 중 반드시 각자 링크를 시크릿 창에서 열어보게 할 것. 권한 설정 때문에 남이 못 여는 링크가 절반쯤 나온다.</a:t>
+              <a:t>[운영 메모]
+실습 중 반드시 각자 링크를 시크릿 창에서 열어보게 할 것. 권한 설정 때문에 남이 못 여는 링크가 절반쯤 나온다.</a:t>
             </a:r>
             <a:endParaRPr lang="en-US" dirty="0"/>
           </a:p>
@@ -775,7 +778,8 @@
           <a:p>
             <a:r>
               <a:rPr lang="en-US" dirty="0"/>
-              <a:t>3번을 가볍게 보면 안 된다. 실제로 지원 서류에서 링크가 안 열리는 사고가 흔하다.</a:t>
+              <a:t>[운영 메모]
+3번을 가볍게 보면 안 된다. 실제로 지원 서류에서 링크가 안 열리는 사고가 흔하다.</a:t>
             </a:r>
             <a:endParaRPr lang="en-US" dirty="0"/>
           </a:p>
@@ -863,7 +867,8 @@
           <a:p>
             <a:r>
               <a:rPr lang="en-US" dirty="0"/>
-              <a:t>1주차 플랫폼 슬라이드와 이어진다. 그때는 개요, 지금은 선택.</a:t>
+              <a:t>[운영 메모]
+1주차 플랫폼 슬라이드와 이어진다. 그때는 개요, 지금은 선택.</a:t>
             </a:r>
             <a:endParaRPr lang="en-US" dirty="0"/>
           </a:p>
@@ -951,7 +956,8 @@
           <a:p>
             <a:r>
               <a:rPr lang="en-US" dirty="0"/>
-              <a:t>학과 특성상 이미지 비중이 높아 웹빌더나 PDF가 유리한 경우가 많다. 노션만으로 가려는 학생에게는 한 번 물어볼 것.</a:t>
+              <a:t>[운영 메모]
+학과 특성상 이미지 비중이 높아 웹빌더나 PDF가 유리한 경우가 많다. 노션만으로 가려는 학생에게는 한 번 물어볼 것.</a:t>
             </a:r>
             <a:endParaRPr lang="en-US" dirty="0"/>
           </a:p>
@@ -1039,7 +1045,8 @@
           <a:p>
             <a:r>
               <a:rPr lang="en-US" dirty="0"/>
-              <a:t>짧게. 실습으로 넘어갈 것.</a:t>
+              <a:t>[운영 메모]
+짧게. 실습으로 넘어갈 것.</a:t>
             </a:r>
             <a:endParaRPr lang="en-US" dirty="0"/>
           </a:p>
@@ -1127,7 +1134,8 @@
           <a:p>
             <a:r>
               <a:rPr lang="en-US" dirty="0"/>
-              <a:t>03을 실습 중에 실제로 확인시킬 것. 휴대폰으로 열어보게 하면 문제가 바로 드러난다.</a:t>
+              <a:t>[운영 메모]
+03을 실습 중에 실제로 확인시킬 것. 휴대폰으로 열어보게 하면 문제가 바로 드러난다.</a:t>
             </a:r>
             <a:endParaRPr lang="en-US" dirty="0"/>
           </a:p>
@@ -1215,7 +1223,8 @@
           <a:p>
             <a:r>
               <a:rPr lang="en-US" dirty="0"/>
-              <a:t>마지막 10분을 절대 생략하지 말 것. 여기서 걸러지는 문제가 가장 많다.</a:t>
+              <a:t>[운영 메모]
+마지막 10분을 절대 생략하지 말 것. 여기서 걸러지는 문제가 가장 많다.</a:t>
             </a:r>
             <a:endParaRPr lang="en-US" dirty="0"/>
           </a:p>
@@ -1303,7 +1312,8 @@
           <a:p>
             <a:r>
               <a:rPr lang="en-US" dirty="0"/>
-              <a:t>제출된 링크를 강사가 직접 한 번씩 열어볼 것. 안 열리는 링크가 반드시 있다.</a:t>
+              <a:t>[운영 메모]
+제출된 링크를 강사가 직접 한 번씩 열어볼 것. 안 열리는 링크가 반드시 있다.</a:t>
             </a:r>
             <a:endParaRPr lang="en-US" dirty="0"/>
           </a:p>
